--- a/assets/ppts/M2.2.1_Network_Layer_Introduction.pptx
+++ b/assets/ppts/M2.2.1_Network_Layer_Introduction.pptx
@@ -8,6 +8,7 @@
     <p:sldId id="256" r:id="rId7"/>
     <p:sldId id="257" r:id="rId8"/>
     <p:sldId id="258" r:id="rId9"/>
+    <p:sldId id="259" r:id="rId10"/>
   </p:sldIdLst>
   <p:sldSz cx="12191695" cy="6858000" type="screen4x3"/>
   <p:notesSz cx="6858000" cy="9144000"/>
@@ -3141,8 +3142,8 @@
         </p:nvSpPr>
         <p:spPr>
           <a:xfrm>
-            <a:off x="822960" y="1188720"/>
-            <a:ext cx="164592" cy="4480560"/>
+            <a:off x="0" y="0"/>
+            <a:ext cx="12191695" cy="137160"/>
           </a:xfrm>
           <a:prstGeom prst="rect">
             <a:avLst/>
@@ -3178,14 +3179,57 @@
       </p:sp>
       <p:sp>
         <p:nvSpPr>
-          <p:cNvPr id="4" name="TextBox 3"/>
+          <p:cNvPr id="4" name="Rectangle 3"/>
+          <p:cNvSpPr/>
+          <p:nvPr/>
+        </p:nvSpPr>
+        <p:spPr>
+          <a:xfrm>
+            <a:off x="822960" y="1097280"/>
+            <a:ext cx="164592" cy="4663440"/>
+          </a:xfrm>
+          <a:prstGeom prst="rect">
+            <a:avLst/>
+          </a:prstGeom>
+          <a:solidFill>
+            <a:srgbClr val="D97706"/>
+          </a:solidFill>
+          <a:ln>
+            <a:noFill/>
+          </a:ln>
+        </p:spPr>
+        <p:style>
+          <a:lnRef idx="1">
+            <a:schemeClr val="accent1"/>
+          </a:lnRef>
+          <a:fillRef idx="3">
+            <a:schemeClr val="accent1"/>
+          </a:fillRef>
+          <a:effectRef idx="2">
+            <a:schemeClr val="accent1"/>
+          </a:effectRef>
+          <a:fontRef idx="minor">
+            <a:schemeClr val="lt1"/>
+          </a:fontRef>
+        </p:style>
+        <p:txBody>
+          <a:bodyPr rtlCol="0" anchor="ctr"/>
+          <a:lstStyle/>
+          <a:p>
+            <a:pPr algn="ctr"/>
+          </a:p>
+        </p:txBody>
+      </p:sp>
+      <p:sp>
+        <p:nvSpPr>
+          <p:cNvPr id="5" name="TextBox 4"/>
           <p:cNvSpPr txBox="1"/>
           <p:nvPr/>
         </p:nvSpPr>
         <p:spPr>
           <a:xfrm>
-            <a:off x="1280160" y="1097280"/>
-            <a:ext cx="10058400" cy="4663440"/>
+            <a:off x="1234440" y="1005840"/>
+            <a:ext cx="10241280" cy="4846320"/>
           </a:xfrm>
           <a:prstGeom prst="rect">
             <a:avLst/>
@@ -3200,70 +3244,165 @@
           <a:p>
             <a:pPr>
               <a:spcAft>
+                <a:spcPts val="1000"/>
+              </a:spcAft>
+              <a:defRPr b="1" sz="1300">
+                <a:solidFill>
+                  <a:srgbClr val="D97706"/>
+                </a:solidFill>
+              </a:defRPr>
+            </a:pPr>
+            <a:r>
+              <a:t>PCCST501 Computer Networks | KTU 2024 Scheme • MODULE 2 • M2.2.1</a:t>
+            </a:r>
+          </a:p>
+          <a:p>
+            <a:pPr>
+              <a:spcAft>
                 <a:spcPts val="1200"/>
               </a:spcAft>
-              <a:defRPr b="1" sz="1300">
-                <a:solidFill>
-                  <a:srgbClr val="D97706"/>
+              <a:defRPr b="1" sz="3000">
+                <a:solidFill>
+                  <a:srgbClr val="F8FAFC"/>
                 </a:solidFill>
               </a:defRPr>
             </a:pPr>
             <a:r>
-              <a:t>PCCST501 Computer Networks | KTU 2024 Scheme • MODULE 2 • M2.2.1</a:t>
+              <a:t>Network Layer Architecture &amp; Router Design</a:t>
             </a:r>
           </a:p>
           <a:p>
             <a:pPr>
               <a:spcAft>
-                <a:spcPts val="1400"/>
+                <a:spcPts val="2400"/>
               </a:spcAft>
-              <a:defRPr b="1" sz="3200">
-                <a:solidFill>
-                  <a:srgbClr val="F8FAFC"/>
+              <a:defRPr sz="1600">
+                <a:solidFill>
+                  <a:srgbClr val="94A3B8"/>
                 </a:solidFill>
               </a:defRPr>
             </a:pPr>
             <a:r>
-              <a:t>Network Layer Architecture &amp; Delivery</a:t>
+              <a:t>Data Plane (Forwarding) vs Control Plane (Routing), Datagram Networks vs Virtual Circuits, Router Fabrics &amp; Buffer Queuing</a:t>
             </a:r>
           </a:p>
           <a:p>
             <a:pPr>
               <a:spcAft>
-                <a:spcPts val="2800"/>
+                <a:spcPts val="300"/>
               </a:spcAft>
-              <a:defRPr sz="1700">
+              <a:defRPr b="1" sz="1350">
+                <a:solidFill>
+                  <a:srgbClr val="E2E8F0"/>
+                </a:solidFill>
+              </a:defRPr>
+            </a:pPr>
+            <a:r>
+              <a:t>Prepared by: Prof. Anju Markose | Assistant Professor, Dept. of CSE | VJCET</a:t>
+            </a:r>
+          </a:p>
+          <a:p>
+            <a:pPr>
+              <a:defRPr sz="1150">
                 <a:solidFill>
                   <a:srgbClr val="94A3B8"/>
                 </a:solidFill>
               </a:defRPr>
             </a:pPr>
             <a:r>
-              <a:t>Host-to-Host Packet Delivery, Data Plane vs Control Plane, Forwarding vs Routing, Service Models</a:t>
-            </a:r>
-          </a:p>
+              <a:t>Viswajyothi College of Engineering and Technology (VJCET), Vazhakulam • KTU S5 CSE</a:t>
+            </a:r>
+          </a:p>
+        </p:txBody>
+      </p:sp>
+      <p:sp>
+        <p:nvSpPr>
+          <p:cNvPr id="6" name="Rounded Rectangle 5"/>
+          <p:cNvSpPr/>
+          <p:nvPr/>
+        </p:nvSpPr>
+        <p:spPr>
+          <a:xfrm>
+            <a:off x="8412480" y="5120640"/>
+            <a:ext cx="3017520" cy="822960"/>
+          </a:xfrm>
+          <a:prstGeom prst="roundRect">
+            <a:avLst/>
+          </a:prstGeom>
+          <a:solidFill>
+            <a:srgbClr val="1E293B"/>
+          </a:solidFill>
+          <a:ln w="12700">
+            <a:solidFill>
+              <a:srgbClr val="0E7490"/>
+            </a:solidFill>
+          </a:ln>
+        </p:spPr>
+        <p:style>
+          <a:lnRef idx="1">
+            <a:schemeClr val="accent1"/>
+          </a:lnRef>
+          <a:fillRef idx="3">
+            <a:schemeClr val="accent1"/>
+          </a:fillRef>
+          <a:effectRef idx="2">
+            <a:schemeClr val="accent1"/>
+          </a:effectRef>
+          <a:fontRef idx="minor">
+            <a:schemeClr val="lt1"/>
+          </a:fontRef>
+        </p:style>
+        <p:txBody>
+          <a:bodyPr rtlCol="0" anchor="ctr"/>
+          <a:lstStyle/>
+          <a:p>
+            <a:pPr algn="ctr"/>
+          </a:p>
+        </p:txBody>
+      </p:sp>
+      <p:sp>
+        <p:nvSpPr>
+          <p:cNvPr id="7" name="TextBox 6"/>
+          <p:cNvSpPr txBox="1"/>
+          <p:nvPr/>
+        </p:nvSpPr>
+        <p:spPr>
+          <a:xfrm>
+            <a:off x="8503920" y="5166360"/>
+            <a:ext cx="2834640" cy="731520"/>
+          </a:xfrm>
+          <a:prstGeom prst="rect">
+            <a:avLst/>
+          </a:prstGeom>
+          <a:noFill/>
+        </p:spPr>
+        <p:txBody>
+          <a:bodyPr wrap="none">
+            <a:spAutoFit/>
+          </a:bodyPr>
+          <a:lstStyle/>
           <a:p>
             <a:pPr>
-              <a:defRPr b="1" sz="1300">
-                <a:solidFill>
-                  <a:srgbClr val="E2E8F0"/>
+              <a:defRPr b="1" sz="1050">
+                <a:solidFill>
+                  <a:srgbClr val="D97706"/>
                 </a:solidFill>
               </a:defRPr>
             </a:pPr>
             <a:r>
-              <a:t>Prepared by: Prof. Anju Markose | Assistant Professor, Dept. of CSE | VJCET</a:t>
+              <a:t>KTU B.Tech Curriculum</a:t>
             </a:r>
           </a:p>
           <a:p>
             <a:pPr>
-              <a:defRPr sz="1100">
-                <a:solidFill>
-                  <a:srgbClr val="94A3B8"/>
+              <a:defRPr sz="950">
+                <a:solidFill>
+                  <a:srgbClr val="F8FAFC"/>
                 </a:solidFill>
               </a:defRPr>
             </a:pPr>
             <a:r>
-              <a:t>Viswajyothi College of Engineering and Technology (VJCET), Vazhakulam</a:t>
+              <a:t>Official Classroom Slide Deck</a:t>
             </a:r>
           </a:p>
         </p:txBody>
@@ -3395,14 +3534,14 @@
           <a:lstStyle/>
           <a:p>
             <a:pPr>
-              <a:defRPr b="1" sz="2300">
+              <a:defRPr b="1" sz="2200">
                 <a:solidFill>
                   <a:srgbClr val="F8FAFC"/>
                 </a:solidFill>
               </a:defRPr>
             </a:pPr>
             <a:r>
-              <a:t>2.2.1.1 Network Layer Core Concepts</a:t>
+              <a:t>2.2.1.1 Network Layer: Data Plane vs Control Plane</a:t>
             </a:r>
           </a:p>
         </p:txBody>
@@ -3437,27 +3576,170 @@
               </a:defRPr>
             </a:pPr>
             <a:r>
-              <a:t>M2.2.1 FORWARDING VS ROUTING</a:t>
-            </a:r>
-          </a:p>
-        </p:txBody>
-      </p:sp>
-      <p:sp>
-        <p:nvSpPr>
-          <p:cNvPr id="6" name="Rounded Rectangle 5"/>
+              <a:t>M2.2.1 NETWORK ARCHITECTURE</a:t>
+            </a:r>
+          </a:p>
+        </p:txBody>
+      </p:sp>
+      <p:sp>
+        <p:nvSpPr>
+          <p:cNvPr id="6" name="TextBox 5"/>
+          <p:cNvSpPr txBox="1"/>
+          <p:nvPr/>
+        </p:nvSpPr>
+        <p:spPr>
+          <a:xfrm>
+            <a:off x="731520" y="1234440"/>
+            <a:ext cx="6858000" cy="4937760"/>
+          </a:xfrm>
+          <a:prstGeom prst="rect">
+            <a:avLst/>
+          </a:prstGeom>
+          <a:noFill/>
+        </p:spPr>
+        <p:txBody>
+          <a:bodyPr wrap="square">
+            <a:spAutoFit/>
+          </a:bodyPr>
+          <a:lstStyle/>
+          <a:p>
+            <a:pPr>
+              <a:spcAft>
+                <a:spcPts val="200"/>
+              </a:spcAft>
+              <a:defRPr b="1" sz="1450">
+                <a:solidFill>
+                  <a:srgbClr val="0F1E4A"/>
+                </a:solidFill>
+              </a:defRPr>
+            </a:pPr>
+            <a:r>
+              <a:t>• Network Layer Core Mission</a:t>
+            </a:r>
+          </a:p>
+          <a:p>
+            <a:pPr>
+              <a:spcAft>
+                <a:spcPts val="700"/>
+              </a:spcAft>
+              <a:defRPr sz="1250">
+                <a:solidFill>
+                  <a:srgbClr val="0F172A"/>
+                </a:solidFill>
+              </a:defRPr>
+            </a:pPr>
+            <a:r>
+              <a:t>   Achieving end-to-end host-to-host packet delivery across multiple heterogeneous intermediate networks.</a:t>
+            </a:r>
+          </a:p>
+          <a:p>
+            <a:pPr>
+              <a:spcAft>
+                <a:spcPts val="200"/>
+              </a:spcAft>
+              <a:defRPr b="1" sz="1450">
+                <a:solidFill>
+                  <a:srgbClr val="0F1E4A"/>
+                </a:solidFill>
+              </a:defRPr>
+            </a:pPr>
+            <a:r>
+              <a:t>• Data Plane (Forwarding)</a:t>
+            </a:r>
+          </a:p>
+          <a:p>
+            <a:pPr>
+              <a:spcAft>
+                <a:spcPts val="700"/>
+              </a:spcAft>
+              <a:defRPr sz="1250">
+                <a:solidFill>
+                  <a:srgbClr val="0F172A"/>
+                </a:solidFill>
+              </a:defRPr>
+            </a:pPr>
+            <a:r>
+              <a:t>   Local, per-router action. Takes a packet arriving on an input link interface and moves it to the appropriate output link interface in nanoseconds. Implemented in high-speed hardware ASIC/TCAM.</a:t>
+            </a:r>
+          </a:p>
+          <a:p>
+            <a:pPr>
+              <a:spcAft>
+                <a:spcPts val="200"/>
+              </a:spcAft>
+              <a:defRPr b="1" sz="1450">
+                <a:solidFill>
+                  <a:srgbClr val="0F1E4A"/>
+                </a:solidFill>
+              </a:defRPr>
+            </a:pPr>
+            <a:r>
+              <a:t>• Control Plane (Routing)</a:t>
+            </a:r>
+          </a:p>
+          <a:p>
+            <a:pPr>
+              <a:spcAft>
+                <a:spcPts val="700"/>
+              </a:spcAft>
+              <a:defRPr sz="1250">
+                <a:solidFill>
+                  <a:srgbClr val="0F172A"/>
+                </a:solidFill>
+              </a:defRPr>
+            </a:pPr>
+            <a:r>
+              <a:t>   Network-wide logic. Determines the end-to-end global path that packets take from source to destination. Implemented in software routing algorithms (OSPF, RIP, BGP) or centralized SDN controllers.</a:t>
+            </a:r>
+          </a:p>
+          <a:p>
+            <a:pPr>
+              <a:spcAft>
+                <a:spcPts val="200"/>
+              </a:spcAft>
+              <a:defRPr b="1" sz="1450">
+                <a:solidFill>
+                  <a:srgbClr val="0F1E4A"/>
+                </a:solidFill>
+              </a:defRPr>
+            </a:pPr>
+            <a:r>
+              <a:t>• Service Models</a:t>
+            </a:r>
+          </a:p>
+          <a:p>
+            <a:pPr>
+              <a:spcAft>
+                <a:spcPts val="700"/>
+              </a:spcAft>
+              <a:defRPr sz="1250">
+                <a:solidFill>
+                  <a:srgbClr val="0F172A"/>
+                </a:solidFill>
+              </a:defRPr>
+            </a:pPr>
+            <a:r>
+              <a:t>   Internet uses Best-Effort Service Model: no guarantees on delivery, delay, bandwidth, or ordering. Simplicity in the network core pushed intelligence to end hosts.</a:t>
+            </a:r>
+          </a:p>
+        </p:txBody>
+      </p:sp>
+      <p:sp>
+        <p:nvSpPr>
+          <p:cNvPr id="7" name="Rounded Rectangle 6"/>
           <p:cNvSpPr/>
           <p:nvPr/>
         </p:nvSpPr>
         <p:spPr>
           <a:xfrm>
-            <a:off x="731520" y="1280160"/>
-            <a:ext cx="5212080" cy="4846320"/>
+            <a:off x="7955279" y="1234440"/>
+            <a:ext cx="3566160" cy="4892040"/>
           </a:xfrm>
           <a:prstGeom prst="roundRect">
             <a:avLst/>
           </a:prstGeom>
           <a:solidFill>
-            <a:srgbClr val="F1F5F9"/>
+            <a:srgbClr val="F8FAFC"/>
           </a:solidFill>
           <a:ln w="19050">
             <a:solidFill>
@@ -3489,14 +3771,14 @@
       </p:sp>
       <p:sp>
         <p:nvSpPr>
-          <p:cNvPr id="7" name="TextBox 6"/>
+          <p:cNvPr id="8" name="TextBox 7"/>
           <p:cNvSpPr txBox="1"/>
           <p:nvPr/>
         </p:nvSpPr>
         <p:spPr>
           <a:xfrm>
-            <a:off x="914400" y="1417320"/>
-            <a:ext cx="4846320" cy="4572000"/>
+            <a:off x="8138160" y="1371600"/>
+            <a:ext cx="3200400" cy="4572000"/>
           </a:xfrm>
           <a:prstGeom prst="rect">
             <a:avLst/>
@@ -3511,16 +3793,16 @@
           <a:p>
             <a:pPr>
               <a:spcAft>
-                <a:spcPts val="1200"/>
+                <a:spcPts val="1000"/>
               </a:spcAft>
-              <a:defRPr b="1" sz="1600">
-                <a:solidFill>
-                  <a:srgbClr val="0F1E4A"/>
+              <a:defRPr b="1" sz="1500">
+                <a:solidFill>
+                  <a:srgbClr val="0E7490"/>
                 </a:solidFill>
               </a:defRPr>
             </a:pPr>
             <a:r>
-              <a:t>Data Plane: Forwarding (Local)</a:t>
+              <a:t>Plane Separation</a:t>
             </a:r>
           </a:p>
           <a:p>
@@ -3528,14 +3810,14 @@
               <a:spcAft>
                 <a:spcPts val="600"/>
               </a:spcAft>
-              <a:defRPr sz="1250">
-                <a:solidFill>
-                  <a:srgbClr val="1E293B"/>
+              <a:defRPr sz="1200">
+                <a:solidFill>
+                  <a:srgbClr val="0F172A"/>
                 </a:solidFill>
               </a:defRPr>
             </a:pPr>
             <a:r>
-              <a:t>• Definition: Router's local action of transferring arriving packet from input port to correct output port</a:t>
+              <a:t>→ Data Plane: Local forwarding (ASIC/Hardware)</a:t>
             </a:r>
           </a:p>
           <a:p>
@@ -3543,14 +3825,14 @@
               <a:spcAft>
                 <a:spcPts val="600"/>
               </a:spcAft>
-              <a:defRPr sz="1250">
-                <a:solidFill>
-                  <a:srgbClr val="1E293B"/>
+              <a:defRPr sz="1200">
+                <a:solidFill>
+                  <a:srgbClr val="0F172A"/>
                 </a:solidFill>
               </a:defRPr>
             </a:pPr>
             <a:r>
-              <a:t>• Timescale: Hardware nanoseconds / microseconds</a:t>
+              <a:t>→ Control Plane: Global routing (Software/OSPF)</a:t>
             </a:r>
           </a:p>
           <a:p>
@@ -3558,14 +3840,14 @@
               <a:spcAft>
                 <a:spcPts val="600"/>
               </a:spcAft>
-              <a:defRPr sz="1250">
-                <a:solidFill>
-                  <a:srgbClr val="1E293B"/>
+              <a:defRPr sz="1200">
+                <a:solidFill>
+                  <a:srgbClr val="0F172A"/>
                 </a:solidFill>
               </a:defRPr>
             </a:pPr>
             <a:r>
-              <a:t>• Mechanism: Forwarding Table lookup using packet destination IP prefix matching (Longest Prefix Match)</a:t>
+              <a:t>→ Nanosecond speed in Data Plane</a:t>
             </a:r>
           </a:p>
           <a:p>
@@ -3573,60 +3855,15 @@
               <a:spcAft>
                 <a:spcPts val="600"/>
               </a:spcAft>
-              <a:defRPr sz="1250">
-                <a:solidFill>
-                  <a:srgbClr val="1E293B"/>
+              <a:defRPr sz="1200">
+                <a:solidFill>
+                  <a:srgbClr val="0F172A"/>
                 </a:solidFill>
               </a:defRPr>
             </a:pPr>
             <a:r>
-              <a:t>• Implementation: ASIC hardware / TCAM (Ternary Content Addressable Memory)</a:t>
-            </a:r>
-          </a:p>
-        </p:txBody>
-      </p:sp>
-      <p:sp>
-        <p:nvSpPr>
-          <p:cNvPr id="8" name="Rounded Rectangle 7"/>
-          <p:cNvSpPr/>
-          <p:nvPr/>
-        </p:nvSpPr>
-        <p:spPr>
-          <a:xfrm>
-            <a:off x="6309360" y="1280160"/>
-            <a:ext cx="5212080" cy="4846320"/>
-          </a:xfrm>
-          <a:prstGeom prst="roundRect">
-            <a:avLst/>
-          </a:prstGeom>
-          <a:solidFill>
-            <a:srgbClr val="EEF2FF"/>
-          </a:solidFill>
-          <a:ln w="19050">
-            <a:solidFill>
-              <a:srgbClr val="0F1E4A"/>
-            </a:solidFill>
-          </a:ln>
-        </p:spPr>
-        <p:style>
-          <a:lnRef idx="1">
-            <a:schemeClr val="accent1"/>
-          </a:lnRef>
-          <a:fillRef idx="3">
-            <a:schemeClr val="accent1"/>
-          </a:fillRef>
-          <a:effectRef idx="2">
-            <a:schemeClr val="accent1"/>
-          </a:effectRef>
-          <a:fontRef idx="minor">
-            <a:schemeClr val="lt1"/>
-          </a:fontRef>
-        </p:style>
-        <p:txBody>
-          <a:bodyPr rtlCol="0" anchor="ctr"/>
-          <a:lstStyle/>
-          <a:p>
-            <a:pPr algn="ctr"/>
+              <a:t>→ Millisecond speed in Control Plane</a:t>
+            </a:r>
           </a:p>
         </p:txBody>
       </p:sp>
@@ -3638,8 +3875,8 @@
         </p:nvSpPr>
         <p:spPr>
           <a:xfrm>
-            <a:off x="6492240" y="1417320"/>
-            <a:ext cx="4846320" cy="4572000"/>
+            <a:off x="731520" y="6327648"/>
+            <a:ext cx="10789920" cy="320040"/>
           </a:xfrm>
           <a:prstGeom prst="rect">
             <a:avLst/>
@@ -3647,83 +3884,20 @@
           <a:noFill/>
         </p:spPr>
         <p:txBody>
-          <a:bodyPr wrap="square">
+          <a:bodyPr wrap="none">
             <a:spAutoFit/>
           </a:bodyPr>
           <a:lstStyle/>
           <a:p>
             <a:pPr>
-              <a:spcAft>
-                <a:spcPts val="1200"/>
-              </a:spcAft>
-              <a:defRPr b="1" sz="1600">
-                <a:solidFill>
-                  <a:srgbClr val="0E7490"/>
+              <a:defRPr sz="950">
+                <a:solidFill>
+                  <a:srgbClr val="64748B"/>
                 </a:solidFill>
               </a:defRPr>
             </a:pPr>
             <a:r>
-              <a:t>Control Plane: Routing (Network-Wide)</a:t>
-            </a:r>
-          </a:p>
-          <a:p>
-            <a:pPr>
-              <a:spcAft>
-                <a:spcPts val="600"/>
-              </a:spcAft>
-              <a:defRPr sz="1250">
-                <a:solidFill>
-                  <a:srgbClr val="1E293B"/>
-                </a:solidFill>
-              </a:defRPr>
-            </a:pPr>
-            <a:r>
-              <a:t>• Definition: Network-wide logic determining end-to-end path taken by packets from source to destination</a:t>
-            </a:r>
-          </a:p>
-          <a:p>
-            <a:pPr>
-              <a:spcAft>
-                <a:spcPts val="600"/>
-              </a:spcAft>
-              <a:defRPr sz="1250">
-                <a:solidFill>
-                  <a:srgbClr val="1E293B"/>
-                </a:solidFill>
-              </a:defRPr>
-            </a:pPr>
-            <a:r>
-              <a:t>• Timescale: Software milliseconds / seconds</a:t>
-            </a:r>
-          </a:p>
-          <a:p>
-            <a:pPr>
-              <a:spcAft>
-                <a:spcPts val="600"/>
-              </a:spcAft>
-              <a:defRPr sz="1250">
-                <a:solidFill>
-                  <a:srgbClr val="1E293B"/>
-                </a:solidFill>
-              </a:defRPr>
-            </a:pPr>
-            <a:r>
-              <a:t>• Mechanism: Routing algorithms (OSPF, RIP, BGP) computing forwarding table entries</a:t>
-            </a:r>
-          </a:p>
-          <a:p>
-            <a:pPr>
-              <a:spcAft>
-                <a:spcPts val="600"/>
-              </a:spcAft>
-              <a:defRPr sz="1250">
-                <a:solidFill>
-                  <a:srgbClr val="1E293B"/>
-                </a:solidFill>
-              </a:defRPr>
-            </a:pPr>
-            <a:r>
-              <a:t>• Approaches: Traditional distributed per-router control vs Software Defined Networking (SDN)</a:t>
+              <a:t>PCCST501 Computer Networks | KTU 2024 Scheme | Prof. Anju Markose | Assistant Professor, Dept. of CSE | VJCET</a:t>
             </a:r>
           </a:p>
         </p:txBody>
@@ -3736,8 +3910,8 @@
         </p:nvSpPr>
         <p:spPr>
           <a:xfrm>
-            <a:off x="731520" y="6309360"/>
-            <a:ext cx="10789920" cy="365760"/>
+            <a:off x="6858000" y="6327648"/>
+            <a:ext cx="4572000" cy="320040"/>
           </a:xfrm>
           <a:prstGeom prst="rect">
             <a:avLst/>
@@ -3750,7 +3924,7 @@
           </a:bodyPr>
           <a:lstStyle/>
           <a:p>
-            <a:pPr>
+            <a:pPr algn="r">
               <a:defRPr sz="950">
                 <a:solidFill>
                   <a:srgbClr val="64748B"/>
@@ -3758,7 +3932,7 @@
               </a:defRPr>
             </a:pPr>
             <a:r>
-              <a:t>PCCST501 Computer Networks | KTU 2024 Scheme | Prof. Anju Markose | Assistant Professor, Dept. of CSE | VJCET</a:t>
+              <a:t>Dept. of CSE, VJCET</a:t>
             </a:r>
           </a:p>
         </p:txBody>
@@ -3890,14 +4064,14 @@
           <a:lstStyle/>
           <a:p>
             <a:pPr>
-              <a:defRPr b="1" sz="2300">
+              <a:defRPr b="1" sz="2200">
                 <a:solidFill>
                   <a:srgbClr val="F8FAFC"/>
                 </a:solidFill>
               </a:defRPr>
             </a:pPr>
             <a:r>
-              <a:t>2.2.1.2 Network Layer Service Models</a:t>
+              <a:t>2.2.1.2 Network Models: Datagram vs Virtual Circuit</a:t>
             </a:r>
           </a:p>
         </p:txBody>
@@ -3932,174 +4106,31 @@
               </a:defRPr>
             </a:pPr>
             <a:r>
-              <a:t>M2.2.1 SERVICE MODELS</a:t>
-            </a:r>
-          </a:p>
-        </p:txBody>
-      </p:sp>
-      <p:sp>
-        <p:nvSpPr>
-          <p:cNvPr id="6" name="TextBox 5"/>
-          <p:cNvSpPr txBox="1"/>
-          <p:nvPr/>
-        </p:nvSpPr>
-        <p:spPr>
-          <a:xfrm>
-            <a:off x="731520" y="1280160"/>
-            <a:ext cx="6858000" cy="4937760"/>
-          </a:xfrm>
-          <a:prstGeom prst="rect">
-            <a:avLst/>
-          </a:prstGeom>
-          <a:noFill/>
-        </p:spPr>
-        <p:txBody>
-          <a:bodyPr wrap="square">
-            <a:spAutoFit/>
-          </a:bodyPr>
-          <a:lstStyle/>
-          <a:p>
-            <a:pPr>
-              <a:spcAft>
-                <a:spcPts val="200"/>
-              </a:spcAft>
-              <a:defRPr b="1" sz="1500">
-                <a:solidFill>
-                  <a:srgbClr val="0F1E4A"/>
-                </a:solidFill>
-              </a:defRPr>
-            </a:pPr>
-            <a:r>
-              <a:t>• Internet Service Model: Best-Effort</a:t>
-            </a:r>
-          </a:p>
-          <a:p>
-            <a:pPr>
-              <a:spcAft>
-                <a:spcPts val="800"/>
-              </a:spcAft>
-              <a:defRPr sz="1300">
-                <a:solidFill>
-                  <a:srgbClr val="1E293B"/>
-                </a:solidFill>
-              </a:defRPr>
-            </a:pPr>
-            <a:r>
-              <a:t>   The IP network layer makes no guarantees on packet delivery, no throughput guarantees, no delay bounds, and no in-order delivery assurance.</a:t>
-            </a:r>
-          </a:p>
-          <a:p>
-            <a:pPr>
-              <a:spcAft>
-                <a:spcPts val="200"/>
-              </a:spcAft>
-              <a:defRPr b="1" sz="1500">
-                <a:solidFill>
-                  <a:srgbClr val="0F1E4A"/>
-                </a:solidFill>
-              </a:defRPr>
-            </a:pPr>
-            <a:r>
-              <a:t>• Why Best-Effort?</a:t>
-            </a:r>
-          </a:p>
-          <a:p>
-            <a:pPr>
-              <a:spcAft>
-                <a:spcPts val="800"/>
-              </a:spcAft>
-              <a:defRPr sz="1300">
-                <a:solidFill>
-                  <a:srgbClr val="1E293B"/>
-                </a:solidFill>
-              </a:defRPr>
-            </a:pPr>
-            <a:r>
-              <a:t>   Simple, highly robust core network design. Intelligence and complexity (reliability, congestion control) pushed to the network edge (hosts/transport layer).</a:t>
-            </a:r>
-          </a:p>
-          <a:p>
-            <a:pPr>
-              <a:spcAft>
-                <a:spcPts val="200"/>
-              </a:spcAft>
-              <a:defRPr b="1" sz="1500">
-                <a:solidFill>
-                  <a:srgbClr val="0F1E4A"/>
-                </a:solidFill>
-              </a:defRPr>
-            </a:pPr>
-            <a:r>
-              <a:t>• Datagram Networks (Internet)</a:t>
-            </a:r>
-          </a:p>
-          <a:p>
-            <a:pPr>
-              <a:spcAft>
-                <a:spcPts val="800"/>
-              </a:spcAft>
-              <a:defRPr sz="1300">
-                <a:solidFill>
-                  <a:srgbClr val="1E293B"/>
-                </a:solidFill>
-              </a:defRPr>
-            </a:pPr>
-            <a:r>
-              <a:t>   Connectionless packet forwarding. Each packet carries destination IP address and is routed independently. Stateless routers.</a:t>
-            </a:r>
-          </a:p>
-          <a:p>
-            <a:pPr>
-              <a:spcAft>
-                <a:spcPts val="200"/>
-              </a:spcAft>
-              <a:defRPr b="1" sz="1500">
-                <a:solidFill>
-                  <a:srgbClr val="0F1E4A"/>
-                </a:solidFill>
-              </a:defRPr>
-            </a:pPr>
-            <a:r>
-              <a:t>• Virtual Circuit Networks (ATM/X.25)</a:t>
-            </a:r>
-          </a:p>
-          <a:p>
-            <a:pPr>
-              <a:spcAft>
-                <a:spcPts val="800"/>
-              </a:spcAft>
-              <a:defRPr sz="1300">
-                <a:solidFill>
-                  <a:srgbClr val="1E293B"/>
-                </a:solidFill>
-              </a:defRPr>
-            </a:pPr>
-            <a:r>
-              <a:t>   Connection-oriented network layer. Requires call setup, per-connection virtual circuit identifiers (VCIs), and stateful switches.</a:t>
-            </a:r>
-          </a:p>
-        </p:txBody>
-      </p:sp>
-      <p:sp>
-        <p:nvSpPr>
-          <p:cNvPr id="7" name="Rounded Rectangle 6"/>
+              <a:t>M2.2.1 DATAGRAM VS VC</a:t>
+            </a:r>
+          </a:p>
+        </p:txBody>
+      </p:sp>
+      <p:sp>
+        <p:nvSpPr>
+          <p:cNvPr id="6" name="Rounded Rectangle 5"/>
           <p:cNvSpPr/>
           <p:nvPr/>
         </p:nvSpPr>
         <p:spPr>
           <a:xfrm>
-            <a:off x="7955279" y="1280160"/>
-            <a:ext cx="3566160" cy="4846320"/>
+            <a:off x="731520" y="1234440"/>
+            <a:ext cx="5212080" cy="4892040"/>
           </a:xfrm>
           <a:prstGeom prst="roundRect">
             <a:avLst/>
           </a:prstGeom>
           <a:solidFill>
-            <a:srgbClr val="F1F5F9"/>
+            <a:srgbClr val="F8FAFC"/>
           </a:solidFill>
           <a:ln w="19050">
             <a:solidFill>
-              <a:srgbClr val="0E7490"/>
+              <a:srgbClr val="0F1E4A"/>
             </a:solidFill>
           </a:ln>
         </p:spPr>
@@ -4127,14 +4158,14 @@
       </p:sp>
       <p:sp>
         <p:nvSpPr>
-          <p:cNvPr id="8" name="TextBox 7"/>
+          <p:cNvPr id="7" name="TextBox 6"/>
           <p:cNvSpPr txBox="1"/>
           <p:nvPr/>
         </p:nvSpPr>
         <p:spPr>
           <a:xfrm>
-            <a:off x="8138160" y="1417320"/>
-            <a:ext cx="3200400" cy="4572000"/>
+            <a:off x="914400" y="1371600"/>
+            <a:ext cx="4846320" cy="4572000"/>
           </a:xfrm>
           <a:prstGeom prst="rect">
             <a:avLst/>
@@ -4151,14 +4182,702 @@
               <a:spcAft>
                 <a:spcPts val="1000"/>
               </a:spcAft>
-              <a:defRPr b="1" sz="1500">
+              <a:defRPr b="1" sz="1550">
+                <a:solidFill>
+                  <a:srgbClr val="0F1E4A"/>
+                </a:solidFill>
+              </a:defRPr>
+            </a:pPr>
+            <a:r>
+              <a:t>Datagram Networks (Internet IP)</a:t>
+            </a:r>
+          </a:p>
+          <a:p>
+            <a:pPr>
+              <a:spcAft>
+                <a:spcPts val="500"/>
+              </a:spcAft>
+              <a:defRPr sz="1200">
+                <a:solidFill>
+                  <a:srgbClr val="0F172A"/>
+                </a:solidFill>
+              </a:defRPr>
+            </a:pPr>
+            <a:r>
+              <a:t>• Connection Setup: No connection setup phase; packets injected immediately</a:t>
+            </a:r>
+          </a:p>
+          <a:p>
+            <a:pPr>
+              <a:spcAft>
+                <a:spcPts val="500"/>
+              </a:spcAft>
+              <a:defRPr sz="1200">
+                <a:solidFill>
+                  <a:srgbClr val="0F172A"/>
+                </a:solidFill>
+              </a:defRPr>
+            </a:pPr>
+            <a:r>
+              <a:t>• Addressing: Packets carry full global 32-bit/128-bit Source and Destination IP</a:t>
+            </a:r>
+          </a:p>
+          <a:p>
+            <a:pPr>
+              <a:spcAft>
+                <a:spcPts val="500"/>
+              </a:spcAft>
+              <a:defRPr sz="1200">
+                <a:solidFill>
+                  <a:srgbClr val="0F172A"/>
+                </a:solidFill>
+              </a:defRPr>
+            </a:pPr>
+            <a:r>
+              <a:t>• Routing Path: Each packet routed independently; successive packets may follow different paths</a:t>
+            </a:r>
+          </a:p>
+          <a:p>
+            <a:pPr>
+              <a:spcAft>
+                <a:spcPts val="500"/>
+              </a:spcAft>
+              <a:defRPr sz="1200">
+                <a:solidFill>
+                  <a:srgbClr val="0F172A"/>
+                </a:solidFill>
+              </a:defRPr>
+            </a:pPr>
+            <a:r>
+              <a:t>• Router State: Stateless routers; failure of a link triggers automatic rerouting</a:t>
+            </a:r>
+          </a:p>
+          <a:p>
+            <a:pPr>
+              <a:spcAft>
+                <a:spcPts val="500"/>
+              </a:spcAft>
+              <a:defRPr sz="1200">
+                <a:solidFill>
+                  <a:srgbClr val="0F172A"/>
+                </a:solidFill>
+              </a:defRPr>
+            </a:pPr>
+            <a:r>
+              <a:t>• Complexity: Pushed to network edge end hosts</a:t>
+            </a:r>
+          </a:p>
+        </p:txBody>
+      </p:sp>
+      <p:sp>
+        <p:nvSpPr>
+          <p:cNvPr id="8" name="Rounded Rectangle 7"/>
+          <p:cNvSpPr/>
+          <p:nvPr/>
+        </p:nvSpPr>
+        <p:spPr>
+          <a:xfrm>
+            <a:off x="6309360" y="1234440"/>
+            <a:ext cx="5212080" cy="4892040"/>
+          </a:xfrm>
+          <a:prstGeom prst="roundRect">
+            <a:avLst/>
+          </a:prstGeom>
+          <a:solidFill>
+            <a:srgbClr val="EEF2FF"/>
+          </a:solidFill>
+          <a:ln w="19050">
+            <a:solidFill>
+              <a:srgbClr val="0E7490"/>
+            </a:solidFill>
+          </a:ln>
+        </p:spPr>
+        <p:style>
+          <a:lnRef idx="1">
+            <a:schemeClr val="accent1"/>
+          </a:lnRef>
+          <a:fillRef idx="3">
+            <a:schemeClr val="accent1"/>
+          </a:fillRef>
+          <a:effectRef idx="2">
+            <a:schemeClr val="accent1"/>
+          </a:effectRef>
+          <a:fontRef idx="minor">
+            <a:schemeClr val="lt1"/>
+          </a:fontRef>
+        </p:style>
+        <p:txBody>
+          <a:bodyPr rtlCol="0" anchor="ctr"/>
+          <a:lstStyle/>
+          <a:p>
+            <a:pPr algn="ctr"/>
+          </a:p>
+        </p:txBody>
+      </p:sp>
+      <p:sp>
+        <p:nvSpPr>
+          <p:cNvPr id="9" name="TextBox 8"/>
+          <p:cNvSpPr txBox="1"/>
+          <p:nvPr/>
+        </p:nvSpPr>
+        <p:spPr>
+          <a:xfrm>
+            <a:off x="6492240" y="1371600"/>
+            <a:ext cx="4846320" cy="4572000"/>
+          </a:xfrm>
+          <a:prstGeom prst="rect">
+            <a:avLst/>
+          </a:prstGeom>
+          <a:noFill/>
+        </p:spPr>
+        <p:txBody>
+          <a:bodyPr wrap="square">
+            <a:spAutoFit/>
+          </a:bodyPr>
+          <a:lstStyle/>
+          <a:p>
+            <a:pPr>
+              <a:spcAft>
+                <a:spcPts val="1000"/>
+              </a:spcAft>
+              <a:defRPr b="1" sz="1550">
                 <a:solidFill>
                   <a:srgbClr val="0E7490"/>
                 </a:solidFill>
               </a:defRPr>
             </a:pPr>
             <a:r>
-              <a:t>Core Summary</a:t>
+              <a:t>Virtual Circuit Networks (ATM / Frame Relay)</a:t>
+            </a:r>
+          </a:p>
+          <a:p>
+            <a:pPr>
+              <a:spcAft>
+                <a:spcPts val="500"/>
+              </a:spcAft>
+              <a:defRPr sz="1200">
+                <a:solidFill>
+                  <a:srgbClr val="0F172A"/>
+                </a:solidFill>
+              </a:defRPr>
+            </a:pPr>
+            <a:r>
+              <a:t>• Connection Setup: Mandatory end-to-end signaling setup before data transfer</a:t>
+            </a:r>
+          </a:p>
+          <a:p>
+            <a:pPr>
+              <a:spcAft>
+                <a:spcPts val="500"/>
+              </a:spcAft>
+              <a:defRPr sz="1200">
+                <a:solidFill>
+                  <a:srgbClr val="0F172A"/>
+                </a:solidFill>
+              </a:defRPr>
+            </a:pPr>
+            <a:r>
+              <a:t>• Addressing: Packets carry small local Virtual Circuit Identifier (VCI)</a:t>
+            </a:r>
+          </a:p>
+          <a:p>
+            <a:pPr>
+              <a:spcAft>
+                <a:spcPts val="500"/>
+              </a:spcAft>
+              <a:defRPr sz="1200">
+                <a:solidFill>
+                  <a:srgbClr val="0F172A"/>
+                </a:solidFill>
+              </a:defRPr>
+            </a:pPr>
+            <a:r>
+              <a:t>• Routing Path: All packets in a connection follow the exact same fixed virtual path</a:t>
+            </a:r>
+          </a:p>
+          <a:p>
+            <a:pPr>
+              <a:spcAft>
+                <a:spcPts val="500"/>
+              </a:spcAft>
+              <a:defRPr sz="1200">
+                <a:solidFill>
+                  <a:srgbClr val="0F172A"/>
+                </a:solidFill>
+              </a:defRPr>
+            </a:pPr>
+            <a:r>
+              <a:t>• Router State: Routers maintain per-connection state tables; link failure drops VC</a:t>
+            </a:r>
+          </a:p>
+          <a:p>
+            <a:pPr>
+              <a:spcAft>
+                <a:spcPts val="500"/>
+              </a:spcAft>
+              <a:defRPr sz="1200">
+                <a:solidFill>
+                  <a:srgbClr val="0F172A"/>
+                </a:solidFill>
+              </a:defRPr>
+            </a:pPr>
+            <a:r>
+              <a:t>• Complexity: Heavy complexity in network core switches</a:t>
+            </a:r>
+          </a:p>
+        </p:txBody>
+      </p:sp>
+      <p:sp>
+        <p:nvSpPr>
+          <p:cNvPr id="10" name="TextBox 9"/>
+          <p:cNvSpPr txBox="1"/>
+          <p:nvPr/>
+        </p:nvSpPr>
+        <p:spPr>
+          <a:xfrm>
+            <a:off x="731520" y="6327648"/>
+            <a:ext cx="10789920" cy="320040"/>
+          </a:xfrm>
+          <a:prstGeom prst="rect">
+            <a:avLst/>
+          </a:prstGeom>
+          <a:noFill/>
+        </p:spPr>
+        <p:txBody>
+          <a:bodyPr wrap="none">
+            <a:spAutoFit/>
+          </a:bodyPr>
+          <a:lstStyle/>
+          <a:p>
+            <a:pPr>
+              <a:defRPr sz="950">
+                <a:solidFill>
+                  <a:srgbClr val="64748B"/>
+                </a:solidFill>
+              </a:defRPr>
+            </a:pPr>
+            <a:r>
+              <a:t>PCCST501 Computer Networks | KTU 2024 Scheme | Prof. Anju Markose | Assistant Professor, Dept. of CSE | VJCET</a:t>
+            </a:r>
+          </a:p>
+        </p:txBody>
+      </p:sp>
+      <p:sp>
+        <p:nvSpPr>
+          <p:cNvPr id="11" name="TextBox 10"/>
+          <p:cNvSpPr txBox="1"/>
+          <p:nvPr/>
+        </p:nvSpPr>
+        <p:spPr>
+          <a:xfrm>
+            <a:off x="6858000" y="6327648"/>
+            <a:ext cx="4572000" cy="320040"/>
+          </a:xfrm>
+          <a:prstGeom prst="rect">
+            <a:avLst/>
+          </a:prstGeom>
+          <a:noFill/>
+        </p:spPr>
+        <p:txBody>
+          <a:bodyPr wrap="none">
+            <a:spAutoFit/>
+          </a:bodyPr>
+          <a:lstStyle/>
+          <a:p>
+            <a:pPr algn="r">
+              <a:defRPr sz="950">
+                <a:solidFill>
+                  <a:srgbClr val="64748B"/>
+                </a:solidFill>
+              </a:defRPr>
+            </a:pPr>
+            <a:r>
+              <a:t>Dept. of CSE, VJCET</a:t>
+            </a:r>
+          </a:p>
+        </p:txBody>
+      </p:sp>
+    </p:spTree>
+  </p:cSld>
+  <p:clrMapOvr>
+    <a:masterClrMapping/>
+  </p:clrMapOvr>
+</p:sld>
+</file>
+
+<file path=ppt/slides/slide4.xml><?xml version="1.0" encoding="utf-8"?>
+<p:sld xmlns:a="http://schemas.openxmlformats.org/drawingml/2006/main" xmlns:p="http://schemas.openxmlformats.org/presentationml/2006/main" xmlns:r="http://schemas.openxmlformats.org/officeDocument/2006/relationships">
+  <p:cSld>
+    <p:spTree>
+      <p:nvGrpSpPr>
+        <p:cNvPr id="1" name=""/>
+        <p:cNvGrpSpPr/>
+        <p:nvPr/>
+      </p:nvGrpSpPr>
+      <p:grpSpPr/>
+      <p:sp>
+        <p:nvSpPr>
+          <p:cNvPr id="2" name="Rectangle 1"/>
+          <p:cNvSpPr/>
+          <p:nvPr/>
+        </p:nvSpPr>
+        <p:spPr>
+          <a:xfrm>
+            <a:off x="0" y="0"/>
+            <a:ext cx="12191695" cy="1005840"/>
+          </a:xfrm>
+          <a:prstGeom prst="rect">
+            <a:avLst/>
+          </a:prstGeom>
+          <a:solidFill>
+            <a:srgbClr val="0F1E4A"/>
+          </a:solidFill>
+          <a:ln>
+            <a:noFill/>
+          </a:ln>
+        </p:spPr>
+        <p:style>
+          <a:lnRef idx="1">
+            <a:schemeClr val="accent1"/>
+          </a:lnRef>
+          <a:fillRef idx="3">
+            <a:schemeClr val="accent1"/>
+          </a:fillRef>
+          <a:effectRef idx="2">
+            <a:schemeClr val="accent1"/>
+          </a:effectRef>
+          <a:fontRef idx="minor">
+            <a:schemeClr val="lt1"/>
+          </a:fontRef>
+        </p:style>
+        <p:txBody>
+          <a:bodyPr rtlCol="0" anchor="ctr"/>
+          <a:lstStyle/>
+          <a:p>
+            <a:pPr algn="ctr"/>
+          </a:p>
+        </p:txBody>
+      </p:sp>
+      <p:sp>
+        <p:nvSpPr>
+          <p:cNvPr id="3" name="Rectangle 2"/>
+          <p:cNvSpPr/>
+          <p:nvPr/>
+        </p:nvSpPr>
+        <p:spPr>
+          <a:xfrm>
+            <a:off x="0" y="969264"/>
+            <a:ext cx="12191695" cy="36576"/>
+          </a:xfrm>
+          <a:prstGeom prst="rect">
+            <a:avLst/>
+          </a:prstGeom>
+          <a:solidFill>
+            <a:srgbClr val="D97706"/>
+          </a:solidFill>
+          <a:ln>
+            <a:noFill/>
+          </a:ln>
+        </p:spPr>
+        <p:style>
+          <a:lnRef idx="1">
+            <a:schemeClr val="accent1"/>
+          </a:lnRef>
+          <a:fillRef idx="3">
+            <a:schemeClr val="accent1"/>
+          </a:fillRef>
+          <a:effectRef idx="2">
+            <a:schemeClr val="accent1"/>
+          </a:effectRef>
+          <a:fontRef idx="minor">
+            <a:schemeClr val="lt1"/>
+          </a:fontRef>
+        </p:style>
+        <p:txBody>
+          <a:bodyPr rtlCol="0" anchor="ctr"/>
+          <a:lstStyle/>
+          <a:p>
+            <a:pPr algn="ctr"/>
+          </a:p>
+        </p:txBody>
+      </p:sp>
+      <p:sp>
+        <p:nvSpPr>
+          <p:cNvPr id="4" name="TextBox 3"/>
+          <p:cNvSpPr txBox="1"/>
+          <p:nvPr/>
+        </p:nvSpPr>
+        <p:spPr>
+          <a:xfrm>
+            <a:off x="731520" y="164592"/>
+            <a:ext cx="8412480" cy="685800"/>
+          </a:xfrm>
+          <a:prstGeom prst="rect">
+            <a:avLst/>
+          </a:prstGeom>
+          <a:noFill/>
+        </p:spPr>
+        <p:txBody>
+          <a:bodyPr wrap="none">
+            <a:spAutoFit/>
+          </a:bodyPr>
+          <a:lstStyle/>
+          <a:p>
+            <a:pPr>
+              <a:defRPr b="1" sz="2100">
+                <a:solidFill>
+                  <a:srgbClr val="F8FAFC"/>
+                </a:solidFill>
+              </a:defRPr>
+            </a:pPr>
+            <a:r>
+              <a:t>🎯 Exam Booster &amp; Review: Network Layer Architecture</a:t>
+            </a:r>
+          </a:p>
+        </p:txBody>
+      </p:sp>
+      <p:sp>
+        <p:nvSpPr>
+          <p:cNvPr id="5" name="TextBox 4"/>
+          <p:cNvSpPr txBox="1"/>
+          <p:nvPr/>
+        </p:nvSpPr>
+        <p:spPr>
+          <a:xfrm>
+            <a:off x="8229600" y="164592"/>
+            <a:ext cx="3291840" cy="685800"/>
+          </a:xfrm>
+          <a:prstGeom prst="rect">
+            <a:avLst/>
+          </a:prstGeom>
+          <a:noFill/>
+        </p:spPr>
+        <p:txBody>
+          <a:bodyPr wrap="none">
+            <a:spAutoFit/>
+          </a:bodyPr>
+          <a:lstStyle/>
+          <a:p>
+            <a:pPr algn="r">
+              <a:defRPr b="1" sz="1300">
+                <a:solidFill>
+                  <a:srgbClr val="D97706"/>
+                </a:solidFill>
+              </a:defRPr>
+            </a:pPr>
+            <a:r>
+              <a:t>M2.2.1</a:t>
+            </a:r>
+          </a:p>
+        </p:txBody>
+      </p:sp>
+      <p:sp>
+        <p:nvSpPr>
+          <p:cNvPr id="6" name="Rounded Rectangle 5"/>
+          <p:cNvSpPr/>
+          <p:nvPr/>
+        </p:nvSpPr>
+        <p:spPr>
+          <a:xfrm>
+            <a:off x="731520" y="1234440"/>
+            <a:ext cx="5303520" cy="4892040"/>
+          </a:xfrm>
+          <a:prstGeom prst="roundRect">
+            <a:avLst/>
+          </a:prstGeom>
+          <a:solidFill>
+            <a:srgbClr val="FEF3C7"/>
+          </a:solidFill>
+          <a:ln w="19050">
+            <a:solidFill>
+              <a:srgbClr val="D97706"/>
+            </a:solidFill>
+          </a:ln>
+        </p:spPr>
+        <p:style>
+          <a:lnRef idx="1">
+            <a:schemeClr val="accent1"/>
+          </a:lnRef>
+          <a:fillRef idx="3">
+            <a:schemeClr val="accent1"/>
+          </a:fillRef>
+          <a:effectRef idx="2">
+            <a:schemeClr val="accent1"/>
+          </a:effectRef>
+          <a:fontRef idx="minor">
+            <a:schemeClr val="lt1"/>
+          </a:fontRef>
+        </p:style>
+        <p:txBody>
+          <a:bodyPr rtlCol="0" anchor="ctr"/>
+          <a:lstStyle/>
+          <a:p>
+            <a:pPr algn="ctr"/>
+          </a:p>
+        </p:txBody>
+      </p:sp>
+      <p:sp>
+        <p:nvSpPr>
+          <p:cNvPr id="7" name="TextBox 6"/>
+          <p:cNvSpPr txBox="1"/>
+          <p:nvPr/>
+        </p:nvSpPr>
+        <p:spPr>
+          <a:xfrm>
+            <a:off x="914400" y="1371600"/>
+            <a:ext cx="4937760" cy="4572000"/>
+          </a:xfrm>
+          <a:prstGeom prst="rect">
+            <a:avLst/>
+          </a:prstGeom>
+          <a:noFill/>
+        </p:spPr>
+        <p:txBody>
+          <a:bodyPr wrap="square">
+            <a:spAutoFit/>
+          </a:bodyPr>
+          <a:lstStyle/>
+          <a:p>
+            <a:pPr>
+              <a:spcAft>
+                <a:spcPts val="1000"/>
+              </a:spcAft>
+              <a:defRPr b="1" sz="1450">
+                <a:solidFill>
+                  <a:srgbClr val="D97706"/>
+                </a:solidFill>
+              </a:defRPr>
+            </a:pPr>
+            <a:r>
+              <a:t>📚 KTU High-Yield Questions (K2 Understand)</a:t>
+            </a:r>
+          </a:p>
+          <a:p>
+            <a:pPr>
+              <a:spcAft>
+                <a:spcPts val="700"/>
+              </a:spcAft>
+              <a:defRPr sz="1200">
+                <a:solidFill>
+                  <a:srgbClr val="0F172A"/>
+                </a:solidFill>
+              </a:defRPr>
+            </a:pPr>
+            <a:r>
+              <a:t>Q: Differentiate between the Data Plane and Control Plane of the Network Layer. (6 Marks)</a:t>
+            </a:r>
+          </a:p>
+          <a:p>
+            <a:pPr>
+              <a:spcAft>
+                <a:spcPts val="700"/>
+              </a:spcAft>
+              <a:defRPr sz="1200">
+                <a:solidFill>
+                  <a:srgbClr val="0F172A"/>
+                </a:solidFill>
+              </a:defRPr>
+            </a:pPr>
+            <a:r>
+              <a:t>Q: Compare Datagram networks and Virtual Circuit networks with respect to connection setup, addressing, and router state. (8 Marks)</a:t>
+            </a:r>
+          </a:p>
+          <a:p>
+            <a:pPr>
+              <a:spcAft>
+                <a:spcPts val="700"/>
+              </a:spcAft>
+              <a:defRPr sz="1200">
+                <a:solidFill>
+                  <a:srgbClr val="0F172A"/>
+                </a:solidFill>
+              </a:defRPr>
+            </a:pPr>
+            <a:r>
+              <a:t>Q: Describe the internal architecture of a modern high-speed router (Input Ports, Switching Fabric, Output Ports). (7 Marks)</a:t>
+            </a:r>
+          </a:p>
+        </p:txBody>
+      </p:sp>
+      <p:sp>
+        <p:nvSpPr>
+          <p:cNvPr id="8" name="Rounded Rectangle 7"/>
+          <p:cNvSpPr/>
+          <p:nvPr/>
+        </p:nvSpPr>
+        <p:spPr>
+          <a:xfrm>
+            <a:off x="6309360" y="1234440"/>
+            <a:ext cx="5212080" cy="4892040"/>
+          </a:xfrm>
+          <a:prstGeom prst="roundRect">
+            <a:avLst/>
+          </a:prstGeom>
+          <a:solidFill>
+            <a:srgbClr val="EEF2FF"/>
+          </a:solidFill>
+          <a:ln w="19050">
+            <a:solidFill>
+              <a:srgbClr val="0E7490"/>
+            </a:solidFill>
+          </a:ln>
+        </p:spPr>
+        <p:style>
+          <a:lnRef idx="1">
+            <a:schemeClr val="accent1"/>
+          </a:lnRef>
+          <a:fillRef idx="3">
+            <a:schemeClr val="accent1"/>
+          </a:fillRef>
+          <a:effectRef idx="2">
+            <a:schemeClr val="accent1"/>
+          </a:effectRef>
+          <a:fontRef idx="minor">
+            <a:schemeClr val="lt1"/>
+          </a:fontRef>
+        </p:style>
+        <p:txBody>
+          <a:bodyPr rtlCol="0" anchor="ctr"/>
+          <a:lstStyle/>
+          <a:p>
+            <a:pPr algn="ctr"/>
+          </a:p>
+        </p:txBody>
+      </p:sp>
+      <p:sp>
+        <p:nvSpPr>
+          <p:cNvPr id="9" name="TextBox 8"/>
+          <p:cNvSpPr txBox="1"/>
+          <p:nvPr/>
+        </p:nvSpPr>
+        <p:spPr>
+          <a:xfrm>
+            <a:off x="6492240" y="1371600"/>
+            <a:ext cx="4846320" cy="4572000"/>
+          </a:xfrm>
+          <a:prstGeom prst="rect">
+            <a:avLst/>
+          </a:prstGeom>
+          <a:noFill/>
+        </p:spPr>
+        <p:txBody>
+          <a:bodyPr wrap="square">
+            <a:spAutoFit/>
+          </a:bodyPr>
+          <a:lstStyle/>
+          <a:p>
+            <a:pPr>
+              <a:spcAft>
+                <a:spcPts val="1000"/>
+              </a:spcAft>
+              <a:defRPr b="1" sz="1450">
+                <a:solidFill>
+                  <a:srgbClr val="0E7490"/>
+                </a:solidFill>
+              </a:defRPr>
+            </a:pPr>
+            <a:r>
+              <a:t>💡 Critical Conceptual Takeaways</a:t>
             </a:r>
           </a:p>
           <a:p>
@@ -4168,12 +4887,12 @@
               </a:spcAft>
               <a:defRPr sz="1200">
                 <a:solidFill>
-                  <a:srgbClr val="1E293B"/>
+                  <a:srgbClr val="0F172A"/>
                 </a:solidFill>
               </a:defRPr>
             </a:pPr>
             <a:r>
-              <a:t>→ Forwarding: Hardware packet switching</a:t>
+              <a:t>✔ Forwarding is local and hardware-based; Routing is global and software-based.</a:t>
             </a:r>
           </a:p>
           <a:p>
@@ -4183,12 +4902,12 @@
               </a:spcAft>
               <a:defRPr sz="1200">
                 <a:solidFill>
-                  <a:srgbClr val="1E293B"/>
+                  <a:srgbClr val="0F172A"/>
                 </a:solidFill>
               </a:defRPr>
             </a:pPr>
             <a:r>
-              <a:t>→ Routing: Path computation algorithms</a:t>
+              <a:t>✔ Internet uses datagram packet switching with stateless routers for maximum resilience.</a:t>
             </a:r>
           </a:p>
           <a:p>
@@ -4198,41 +4917,26 @@
               </a:spcAft>
               <a:defRPr sz="1200">
                 <a:solidFill>
-                  <a:srgbClr val="1E293B"/>
+                  <a:srgbClr val="0F172A"/>
                 </a:solidFill>
               </a:defRPr>
             </a:pPr>
             <a:r>
-              <a:t>→ IP Model: Best-effort datagrams</a:t>
-            </a:r>
-          </a:p>
-          <a:p>
-            <a:pPr>
-              <a:spcAft>
-                <a:spcPts val="600"/>
-              </a:spcAft>
-              <a:defRPr sz="1200">
-                <a:solidFill>
-                  <a:srgbClr val="1E293B"/>
-                </a:solidFill>
-              </a:defRPr>
-            </a:pPr>
-            <a:r>
-              <a:t>→ End-to-End Principle: Smart edge, simple core</a:t>
-            </a:r>
-          </a:p>
-        </p:txBody>
-      </p:sp>
-      <p:sp>
-        <p:nvSpPr>
-          <p:cNvPr id="9" name="TextBox 8"/>
+              <a:t>✔ Crossbar switching fabrics eliminate internal shared bus contention in high-speed routers.</a:t>
+            </a:r>
+          </a:p>
+        </p:txBody>
+      </p:sp>
+      <p:sp>
+        <p:nvSpPr>
+          <p:cNvPr id="10" name="TextBox 9"/>
           <p:cNvSpPr txBox="1"/>
           <p:nvPr/>
         </p:nvSpPr>
         <p:spPr>
           <a:xfrm>
-            <a:off x="731520" y="6309360"/>
-            <a:ext cx="10789920" cy="365760"/>
+            <a:off x="731520" y="6327648"/>
+            <a:ext cx="10789920" cy="320040"/>
           </a:xfrm>
           <a:prstGeom prst="rect">
             <a:avLst/>
@@ -4254,6 +4958,41 @@
             </a:pPr>
             <a:r>
               <a:t>PCCST501 Computer Networks | KTU 2024 Scheme | Prof. Anju Markose | Assistant Professor, Dept. of CSE | VJCET</a:t>
+            </a:r>
+          </a:p>
+        </p:txBody>
+      </p:sp>
+      <p:sp>
+        <p:nvSpPr>
+          <p:cNvPr id="11" name="TextBox 10"/>
+          <p:cNvSpPr txBox="1"/>
+          <p:nvPr/>
+        </p:nvSpPr>
+        <p:spPr>
+          <a:xfrm>
+            <a:off x="6858000" y="6327648"/>
+            <a:ext cx="4572000" cy="320040"/>
+          </a:xfrm>
+          <a:prstGeom prst="rect">
+            <a:avLst/>
+          </a:prstGeom>
+          <a:noFill/>
+        </p:spPr>
+        <p:txBody>
+          <a:bodyPr wrap="none">
+            <a:spAutoFit/>
+          </a:bodyPr>
+          <a:lstStyle/>
+          <a:p>
+            <a:pPr algn="r">
+              <a:defRPr sz="950">
+                <a:solidFill>
+                  <a:srgbClr val="64748B"/>
+                </a:solidFill>
+              </a:defRPr>
+            </a:pPr>
+            <a:r>
+              <a:t>Dept. of CSE, VJCET</a:t>
             </a:r>
           </a:p>
         </p:txBody>
